--- a/session4/exam-strategy/q1/q1_exam_strategy.pptx
+++ b/session4/exam-strategy/q1/q1_exam_strategy.pptx
@@ -3187,8 +3187,8 @@
         </p:nvSpPr>
         <p:spPr>
           <a:xfrm>
-            <a:off x="274320" y="685800"/>
-            <a:ext cx="6400800" cy="1645920"/>
+            <a:off x="274320" y="640080"/>
+            <a:ext cx="6583680" cy="1280160"/>
           </a:xfrm>
           <a:prstGeom prst="rect">
             <a:avLst/>
@@ -3196,13 +3196,13 @@
           <a:noFill/>
         </p:spPr>
         <p:txBody>
-          <a:bodyPr wrap="square">
+          <a:bodyPr wrap="square" tIns="0" bIns="0">
             <a:spAutoFit/>
           </a:bodyPr>
           <a:lstStyle/>
           <a:p>
             <a:pPr>
-              <a:defRPr sz="1100">
+              <a:defRPr sz="900">
                 <a:solidFill>
                   <a:srgbClr val="FFFFFF"/>
                 </a:solidFill>
@@ -3210,7 +3210,7 @@
               </a:defRPr>
             </a:pPr>
             <a:r>
-              <a:t>A company notices performance degradation in one of its production web applications. The application is running on AWS services and uses a microservices architecture. The company suspects that one of these microservices is causing the performance issue. Which AWS solution should the company use to identify the service that is contributing to higher application latency?</a:t>
+              <a:t>A company notices performance degradation in one of its production web applications. The application is running on AWS services and uses a microservices architecture. The company suspects that one of these microservices is causing the performance issue. Which AWS solution should the company use to identify the service that is contributing to hig...</a:t>
             </a:r>
           </a:p>
         </p:txBody>
@@ -3223,8 +3223,8 @@
         </p:nvSpPr>
         <p:spPr>
           <a:xfrm>
-            <a:off x="365760" y="2377440"/>
-            <a:ext cx="274320" cy="274320"/>
+            <a:off x="274320" y="2057400"/>
+            <a:ext cx="201168" cy="201168"/>
           </a:xfrm>
           <a:prstGeom prst="ellipse">
             <a:avLst/>
@@ -3255,7 +3255,7 @@
           <a:lstStyle/>
           <a:p>
             <a:pPr algn="ctr">
-              <a:defRPr sz="900" b="1">
+              <a:defRPr sz="700" b="1">
                 <a:solidFill>
                   <a:srgbClr val="FFFFFF"/>
                 </a:solidFill>
@@ -3275,8 +3275,8 @@
         </p:nvSpPr>
         <p:spPr>
           <a:xfrm>
-            <a:off x="777240" y="2377440"/>
-            <a:ext cx="5943600" cy="411480"/>
+            <a:off x="548640" y="2011680"/>
+            <a:ext cx="6400800" cy="736092"/>
           </a:xfrm>
           <a:prstGeom prst="rect">
             <a:avLst/>
@@ -3284,13 +3284,13 @@
           <a:noFill/>
         </p:spPr>
         <p:txBody>
-          <a:bodyPr wrap="square">
+          <a:bodyPr wrap="square" tIns="25400" bIns="0" lIns="0">
             <a:spAutoFit/>
           </a:bodyPr>
           <a:lstStyle/>
           <a:p>
             <a:pPr>
-              <a:defRPr sz="1000">
+              <a:defRPr sz="800">
                 <a:solidFill>
                   <a:srgbClr val="CCCCCC"/>
                 </a:solidFill>
@@ -3298,7 +3298,7 @@
               </a:defRPr>
             </a:pPr>
             <a:r>
-              <a:t>X-Ray creates a map of services used by your application with trace data. You can use the trace data to drill into speci</a:t>
+              <a:t>X-Ray creates a map of services used by your application with trace data. You can use the trace data</a:t>
             </a:r>
           </a:p>
         </p:txBody>
@@ -3311,8 +3311,8 @@
         </p:nvSpPr>
         <p:spPr>
           <a:xfrm>
-            <a:off x="365760" y="2834640"/>
-            <a:ext cx="274320" cy="274320"/>
+            <a:off x="274320" y="2811780"/>
+            <a:ext cx="201168" cy="201168"/>
           </a:xfrm>
           <a:prstGeom prst="ellipse">
             <a:avLst/>
@@ -3343,7 +3343,7 @@
           <a:lstStyle/>
           <a:p>
             <a:pPr algn="ctr">
-              <a:defRPr sz="900" b="1">
+              <a:defRPr sz="700" b="1">
                 <a:solidFill>
                   <a:srgbClr val="FFFFFF"/>
                 </a:solidFill>
@@ -3363,8 +3363,8 @@
         </p:nvSpPr>
         <p:spPr>
           <a:xfrm>
-            <a:off x="777240" y="2834640"/>
-            <a:ext cx="5943600" cy="411480"/>
+            <a:off x="548640" y="2766060"/>
+            <a:ext cx="6400800" cy="736092"/>
           </a:xfrm>
           <a:prstGeom prst="rect">
             <a:avLst/>
@@ -3372,13 +3372,13 @@
           <a:noFill/>
         </p:spPr>
         <p:txBody>
-          <a:bodyPr wrap="square">
+          <a:bodyPr wrap="square" tIns="25400" bIns="0" lIns="0">
             <a:spAutoFit/>
           </a:bodyPr>
           <a:lstStyle/>
           <a:p>
             <a:pPr>
-              <a:defRPr sz="1000">
+              <a:defRPr sz="800">
                 <a:solidFill>
                   <a:srgbClr val="CCCCCC"/>
                 </a:solidFill>
@@ -3386,7 +3386,7 @@
               </a:defRPr>
             </a:pPr>
             <a:r>
-              <a:t>CloudTrail event history is used to record API calls for governance, compliance operation, and risk auditing purposes. C</a:t>
+              <a:t>CloudTrail event history is used to record API calls for governance, compliance operation, and risk </a:t>
             </a:r>
           </a:p>
         </p:txBody>
@@ -3399,8 +3399,8 @@
         </p:nvSpPr>
         <p:spPr>
           <a:xfrm>
-            <a:off x="365760" y="3291840"/>
-            <a:ext cx="274320" cy="274320"/>
+            <a:off x="274320" y="3566160"/>
+            <a:ext cx="201168" cy="201168"/>
           </a:xfrm>
           <a:prstGeom prst="ellipse">
             <a:avLst/>
@@ -3431,7 +3431,7 @@
           <a:lstStyle/>
           <a:p>
             <a:pPr algn="ctr">
-              <a:defRPr sz="900" b="1">
+              <a:defRPr sz="700" b="1">
                 <a:solidFill>
                   <a:srgbClr val="FFFFFF"/>
                 </a:solidFill>
@@ -3451,8 +3451,8 @@
         </p:nvSpPr>
         <p:spPr>
           <a:xfrm>
-            <a:off x="777240" y="3291840"/>
-            <a:ext cx="5943600" cy="411480"/>
+            <a:off x="548640" y="3520440"/>
+            <a:ext cx="6400800" cy="736092"/>
           </a:xfrm>
           <a:prstGeom prst="rect">
             <a:avLst/>
@@ -3460,13 +3460,13 @@
           <a:noFill/>
         </p:spPr>
         <p:txBody>
-          <a:bodyPr wrap="square">
+          <a:bodyPr wrap="square" tIns="25400" bIns="0" lIns="0">
             <a:spAutoFit/>
           </a:bodyPr>
           <a:lstStyle/>
           <a:p>
             <a:pPr>
-              <a:defRPr sz="1000">
+              <a:defRPr sz="800">
                 <a:solidFill>
                   <a:srgbClr val="CCCCCC"/>
                 </a:solidFill>
@@ -3474,7 +3474,7 @@
               </a:defRPr>
             </a:pPr>
             <a:r>
-              <a:t>EventBridge (CloudWatch Events) delivers a near-real-time stream of system events that describe changes in Amazon Web Se</a:t>
+              <a:t>EventBridge (CloudWatch Events) delivers a near-real-time stream of system events that describe chan</a:t>
             </a:r>
           </a:p>
         </p:txBody>
@@ -3487,8 +3487,8 @@
         </p:nvSpPr>
         <p:spPr>
           <a:xfrm>
-            <a:off x="365760" y="3749039"/>
-            <a:ext cx="274320" cy="274320"/>
+            <a:off x="274320" y="4320540"/>
+            <a:ext cx="201168" cy="201168"/>
           </a:xfrm>
           <a:prstGeom prst="ellipse">
             <a:avLst/>
@@ -3519,7 +3519,7 @@
           <a:lstStyle/>
           <a:p>
             <a:pPr algn="ctr">
-              <a:defRPr sz="900" b="1">
+              <a:defRPr sz="700" b="1">
                 <a:solidFill>
                   <a:srgbClr val="FFFFFF"/>
                 </a:solidFill>
@@ -3539,8 +3539,8 @@
         </p:nvSpPr>
         <p:spPr>
           <a:xfrm>
-            <a:off x="777240" y="3749039"/>
-            <a:ext cx="5943600" cy="411480"/>
+            <a:off x="548640" y="4274820"/>
+            <a:ext cx="6400800" cy="736092"/>
           </a:xfrm>
           <a:prstGeom prst="rect">
             <a:avLst/>
@@ -3548,13 +3548,13 @@
           <a:noFill/>
         </p:spPr>
         <p:txBody>
-          <a:bodyPr wrap="square">
+          <a:bodyPr wrap="square" tIns="25400" bIns="0" lIns="0">
             <a:spAutoFit/>
           </a:bodyPr>
           <a:lstStyle/>
           <a:p>
             <a:pPr>
-              <a:defRPr sz="1000">
+              <a:defRPr sz="800">
                 <a:solidFill>
                   <a:srgbClr val="CCCCCC"/>
                 </a:solidFill>
@@ -3562,7 +3562,7 @@
               </a:defRPr>
             </a:pPr>
             <a:r>
-              <a:t>Trusted Advisor provides real-time guidance to help provision AWS resources to follow AWS best practices. It can report </a:t>
+              <a:t>Trusted Advisor provides real-time guidance to help provision AWS resources to follow AWS best pract</a:t>
             </a:r>
           </a:p>
         </p:txBody>
@@ -3845,7 +3845,7 @@
         <p:spPr>
           <a:xfrm>
             <a:off x="182880" y="914400"/>
-            <a:ext cx="5280660" cy="3840480"/>
+            <a:ext cx="2910559" cy="3840480"/>
           </a:xfrm>
           <a:prstGeom prst="rect">
             <a:avLst/>
@@ -3980,9 +3980,9 @@
           <a:p>
             <a:pPr>
               <a:spcAft>
-                <a:spcPts val="600"/>
+                <a:spcPts val="400"/>
               </a:spcAft>
-              <a:defRPr sz="900">
+              <a:defRPr sz="800">
                 <a:solidFill>
                   <a:srgbClr val="212121"/>
                 </a:solidFill>
@@ -3990,15 +3990,15 @@
               </a:defRPr>
             </a:pPr>
             <a:r>
-              <a:t>• X-Ray creates a map of services used by your application with trace data.</a:t>
+              <a:t>• X-Ray creates a map of services used by your application with trace data</a:t>
             </a:r>
           </a:p>
           <a:p>
             <a:pPr>
               <a:spcAft>
-                <a:spcPts val="600"/>
+                <a:spcPts val="400"/>
               </a:spcAft>
-              <a:defRPr sz="900">
+              <a:defRPr sz="800">
                 <a:solidFill>
                   <a:srgbClr val="212121"/>
                 </a:solidFill>
@@ -4006,15 +4006,15 @@
               </a:defRPr>
             </a:pPr>
             <a:r>
-              <a:t>• You can use the trace data to drill into specific services or issues.</a:t>
+              <a:t>• You can use the trace data to drill into specific services or issues</a:t>
             </a:r>
           </a:p>
           <a:p>
             <a:pPr>
               <a:spcAft>
-                <a:spcPts val="600"/>
+                <a:spcPts val="400"/>
               </a:spcAft>
-              <a:defRPr sz="900">
+              <a:defRPr sz="800">
                 <a:solidFill>
                   <a:srgbClr val="212121"/>
                 </a:solidFill>
@@ -4022,7 +4022,23 @@
               </a:defRPr>
             </a:pPr>
             <a:r>
-              <a:t>• This data provides a view of connections between services in your application and aggregated data for each service, including average latency and failure rates.</a:t>
+              <a:t>• This data provides a view of connections between services in your application and aggregated data for each service</a:t>
+            </a:r>
+          </a:p>
+          <a:p>
+            <a:pPr>
+              <a:spcAft>
+                <a:spcPts val="400"/>
+              </a:spcAft>
+              <a:defRPr sz="800">
+                <a:solidFill>
+                  <a:srgbClr val="212121"/>
+                </a:solidFill>
+                <a:latin typeface="Segoe UI"/>
+              </a:defRPr>
+            </a:pPr>
+            <a:r>
+              <a:t>• Including average latency and failure rates</a:t>
             </a:r>
           </a:p>
         </p:txBody>
@@ -4201,8 +4217,8 @@
         </p:blipFill>
         <p:spPr>
           <a:xfrm>
-            <a:off x="182880" y="914400"/>
-            <a:ext cx="5280660" cy="3840480"/>
+            <a:off x="182880" y="1165256"/>
+            <a:ext cx="5303520" cy="3338767"/>
           </a:xfrm>
           <a:prstGeom prst="rect">
             <a:avLst/>
@@ -4337,9 +4353,9 @@
           <a:p>
             <a:pPr>
               <a:spcAft>
-                <a:spcPts val="600"/>
+                <a:spcPts val="400"/>
               </a:spcAft>
-              <a:defRPr sz="900">
+              <a:defRPr sz="800">
                 <a:solidFill>
                   <a:srgbClr val="212121"/>
                 </a:solidFill>
@@ -4347,15 +4363,15 @@
               </a:defRPr>
             </a:pPr>
             <a:r>
-              <a:t>• CloudTrail event history is used to record API calls for governance, compliance operation, and risk auditing purposes.</a:t>
+              <a:t>• CloudTrail event history is used to record API calls for governance</a:t>
             </a:r>
           </a:p>
           <a:p>
             <a:pPr>
               <a:spcAft>
-                <a:spcPts val="600"/>
+                <a:spcPts val="400"/>
               </a:spcAft>
-              <a:defRPr sz="900">
+              <a:defRPr sz="800">
                 <a:solidFill>
                   <a:srgbClr val="212121"/>
                 </a:solidFill>
@@ -4363,7 +4379,39 @@
               </a:defRPr>
             </a:pPr>
             <a:r>
-              <a:t>• CloudTrail is not a service that is used for identifying application performance issues.</a:t>
+              <a:t>• Compliance operation</a:t>
+            </a:r>
+          </a:p>
+          <a:p>
+            <a:pPr>
+              <a:spcAft>
+                <a:spcPts val="400"/>
+              </a:spcAft>
+              <a:defRPr sz="800">
+                <a:solidFill>
+                  <a:srgbClr val="212121"/>
+                </a:solidFill>
+                <a:latin typeface="Segoe UI"/>
+              </a:defRPr>
+            </a:pPr>
+            <a:r>
+              <a:t>• And risk auditing purposes</a:t>
+            </a:r>
+          </a:p>
+          <a:p>
+            <a:pPr>
+              <a:spcAft>
+                <a:spcPts val="400"/>
+              </a:spcAft>
+              <a:defRPr sz="800">
+                <a:solidFill>
+                  <a:srgbClr val="212121"/>
+                </a:solidFill>
+                <a:latin typeface="Segoe UI"/>
+              </a:defRPr>
+            </a:pPr>
+            <a:r>
+              <a:t>• CloudTrail is not a service that is used for identifying application performance issues</a:t>
             </a:r>
           </a:p>
         </p:txBody>
@@ -4542,8 +4590,8 @@
         </p:blipFill>
         <p:spPr>
           <a:xfrm>
-            <a:off x="182880" y="914400"/>
-            <a:ext cx="5280660" cy="3840480"/>
+            <a:off x="182880" y="1238983"/>
+            <a:ext cx="5303520" cy="3191313"/>
           </a:xfrm>
           <a:prstGeom prst="rect">
             <a:avLst/>
@@ -4678,9 +4726,9 @@
           <a:p>
             <a:pPr>
               <a:spcAft>
-                <a:spcPts val="600"/>
+                <a:spcPts val="400"/>
               </a:spcAft>
-              <a:defRPr sz="900">
+              <a:defRPr sz="800">
                 <a:solidFill>
                   <a:srgbClr val="212121"/>
                 </a:solidFill>
@@ -4688,15 +4736,15 @@
               </a:defRPr>
             </a:pPr>
             <a:r>
-              <a:t>• EventBridge (CloudWatch Events) delivers a near-real-time stream of system events that describe changes in Amazon Web Services resources.</a:t>
+              <a:t>• EventBridge (CloudWatch Events) delivers a near-real-time stream of system events that describe changes in Amazon Web Services resources</a:t>
             </a:r>
           </a:p>
           <a:p>
             <a:pPr>
               <a:spcAft>
-                <a:spcPts val="600"/>
+                <a:spcPts val="400"/>
               </a:spcAft>
-              <a:defRPr sz="900">
+              <a:defRPr sz="800">
                 <a:solidFill>
                   <a:srgbClr val="212121"/>
                 </a:solidFill>
@@ -4704,7 +4752,7 @@
               </a:defRPr>
             </a:pPr>
             <a:r>
-              <a:t>• It is not used for identifying application performance issues.</a:t>
+              <a:t>• It is not used for identifying application performance issues</a:t>
             </a:r>
           </a:p>
         </p:txBody>
@@ -4883,8 +4931,8 @@
         </p:blipFill>
         <p:spPr>
           <a:xfrm>
-            <a:off x="182880" y="914400"/>
-            <a:ext cx="3238051" cy="3840480"/>
+            <a:off x="182880" y="1288961"/>
+            <a:ext cx="5303520" cy="3091356"/>
           </a:xfrm>
           <a:prstGeom prst="rect">
             <a:avLst/>
@@ -5019,9 +5067,9 @@
           <a:p>
             <a:pPr>
               <a:spcAft>
-                <a:spcPts val="600"/>
+                <a:spcPts val="400"/>
               </a:spcAft>
-              <a:defRPr sz="900">
+              <a:defRPr sz="800">
                 <a:solidFill>
                   <a:srgbClr val="212121"/>
                 </a:solidFill>
@@ -5029,15 +5077,15 @@
               </a:defRPr>
             </a:pPr>
             <a:r>
-              <a:t>• Trusted Advisor provides real-time guidance to help provision AWS resources to follow AWS best practices.</a:t>
+              <a:t>• Trusted Advisor provides real-time guidance to help provision AWS resources to follow AWS best practices</a:t>
             </a:r>
           </a:p>
           <a:p>
             <a:pPr>
               <a:spcAft>
-                <a:spcPts val="600"/>
+                <a:spcPts val="400"/>
               </a:spcAft>
-              <a:defRPr sz="900">
+              <a:defRPr sz="800">
                 <a:solidFill>
                   <a:srgbClr val="212121"/>
                 </a:solidFill>
@@ -5045,7 +5093,23 @@
               </a:defRPr>
             </a:pPr>
             <a:r>
-              <a:t>• It can report overall system utilization, but it is not used for identifying application performance issues.</a:t>
+              <a:t>• It can report overall system utilization</a:t>
+            </a:r>
+          </a:p>
+          <a:p>
+            <a:pPr>
+              <a:spcAft>
+                <a:spcPts val="400"/>
+              </a:spcAft>
+              <a:defRPr sz="800">
+                <a:solidFill>
+                  <a:srgbClr val="212121"/>
+                </a:solidFill>
+                <a:latin typeface="Segoe UI"/>
+              </a:defRPr>
+            </a:pPr>
+            <a:r>
+              <a:t>• But it is not used for identifying application performance issues</a:t>
             </a:r>
           </a:p>
         </p:txBody>

--- a/session4/exam-strategy/q1/q1_exam_strategy.pptx
+++ b/session4/exam-strategy/q1/q1_exam_strategy.pptx
@@ -3187,8 +3187,8 @@
         </p:nvSpPr>
         <p:spPr>
           <a:xfrm>
-            <a:off x="274320" y="640080"/>
-            <a:ext cx="6583680" cy="1280160"/>
+            <a:off x="274320" y="685800"/>
+            <a:ext cx="6400800" cy="1645920"/>
           </a:xfrm>
           <a:prstGeom prst="rect">
             <a:avLst/>
@@ -3196,13 +3196,13 @@
           <a:noFill/>
         </p:spPr>
         <p:txBody>
-          <a:bodyPr wrap="square" tIns="0" bIns="0">
+          <a:bodyPr wrap="square">
             <a:spAutoFit/>
           </a:bodyPr>
           <a:lstStyle/>
           <a:p>
             <a:pPr>
-              <a:defRPr sz="900">
+              <a:defRPr sz="1100">
                 <a:solidFill>
                   <a:srgbClr val="FFFFFF"/>
                 </a:solidFill>
@@ -3210,7 +3210,7 @@
               </a:defRPr>
             </a:pPr>
             <a:r>
-              <a:t>A company notices performance degradation in one of its production web applications. The application is running on AWS services and uses a microservices architecture. The company suspects that one of these microservices is causing the performance issue. Which AWS solution should the company use to identify the service that is contributing to hig...</a:t>
+              <a:t>A company notices performance degradation in one of its production web applications. The application is running on AWS services and uses a microservices architecture. The company suspects that one of these microservices is causing the performance issue. Which AWS solution should the company use to identify the service that is contributing to higher application latency?</a:t>
             </a:r>
           </a:p>
         </p:txBody>
@@ -3223,8 +3223,8 @@
         </p:nvSpPr>
         <p:spPr>
           <a:xfrm>
-            <a:off x="274320" y="2057400"/>
-            <a:ext cx="201168" cy="201168"/>
+            <a:off x="365760" y="2377440"/>
+            <a:ext cx="274320" cy="274320"/>
           </a:xfrm>
           <a:prstGeom prst="ellipse">
             <a:avLst/>
@@ -3255,7 +3255,7 @@
           <a:lstStyle/>
           <a:p>
             <a:pPr algn="ctr">
-              <a:defRPr sz="700" b="1">
+              <a:defRPr sz="900" b="1">
                 <a:solidFill>
                   <a:srgbClr val="FFFFFF"/>
                 </a:solidFill>
@@ -3275,8 +3275,8 @@
         </p:nvSpPr>
         <p:spPr>
           <a:xfrm>
-            <a:off x="548640" y="2011680"/>
-            <a:ext cx="6400800" cy="736092"/>
+            <a:off x="777240" y="2377440"/>
+            <a:ext cx="5943600" cy="411480"/>
           </a:xfrm>
           <a:prstGeom prst="rect">
             <a:avLst/>
@@ -3284,13 +3284,13 @@
           <a:noFill/>
         </p:spPr>
         <p:txBody>
-          <a:bodyPr wrap="square" tIns="25400" bIns="0" lIns="0">
+          <a:bodyPr wrap="square">
             <a:spAutoFit/>
           </a:bodyPr>
           <a:lstStyle/>
           <a:p>
             <a:pPr>
-              <a:defRPr sz="800">
+              <a:defRPr sz="1000">
                 <a:solidFill>
                   <a:srgbClr val="CCCCCC"/>
                 </a:solidFill>
@@ -3298,7 +3298,7 @@
               </a:defRPr>
             </a:pPr>
             <a:r>
-              <a:t>X-Ray creates a map of services used by your application with trace data. You can use the trace data</a:t>
+              <a:t>X-Ray creates a map of services used by your application with trace data. You can use the trace data to drill into speci</a:t>
             </a:r>
           </a:p>
         </p:txBody>
@@ -3311,8 +3311,8 @@
         </p:nvSpPr>
         <p:spPr>
           <a:xfrm>
-            <a:off x="274320" y="2811780"/>
-            <a:ext cx="201168" cy="201168"/>
+            <a:off x="365760" y="2834640"/>
+            <a:ext cx="274320" cy="274320"/>
           </a:xfrm>
           <a:prstGeom prst="ellipse">
             <a:avLst/>
@@ -3343,7 +3343,7 @@
           <a:lstStyle/>
           <a:p>
             <a:pPr algn="ctr">
-              <a:defRPr sz="700" b="1">
+              <a:defRPr sz="900" b="1">
                 <a:solidFill>
                   <a:srgbClr val="FFFFFF"/>
                 </a:solidFill>
@@ -3363,8 +3363,8 @@
         </p:nvSpPr>
         <p:spPr>
           <a:xfrm>
-            <a:off x="548640" y="2766060"/>
-            <a:ext cx="6400800" cy="736092"/>
+            <a:off x="777240" y="2834640"/>
+            <a:ext cx="5943600" cy="411480"/>
           </a:xfrm>
           <a:prstGeom prst="rect">
             <a:avLst/>
@@ -3372,13 +3372,13 @@
           <a:noFill/>
         </p:spPr>
         <p:txBody>
-          <a:bodyPr wrap="square" tIns="25400" bIns="0" lIns="0">
+          <a:bodyPr wrap="square">
             <a:spAutoFit/>
           </a:bodyPr>
           <a:lstStyle/>
           <a:p>
             <a:pPr>
-              <a:defRPr sz="800">
+              <a:defRPr sz="1000">
                 <a:solidFill>
                   <a:srgbClr val="CCCCCC"/>
                 </a:solidFill>
@@ -3386,7 +3386,7 @@
               </a:defRPr>
             </a:pPr>
             <a:r>
-              <a:t>CloudTrail event history is used to record API calls for governance, compliance operation, and risk </a:t>
+              <a:t>CloudTrail event history is used to record API calls for governance, compliance operation, and risk auditing purposes. C</a:t>
             </a:r>
           </a:p>
         </p:txBody>
@@ -3399,8 +3399,8 @@
         </p:nvSpPr>
         <p:spPr>
           <a:xfrm>
-            <a:off x="274320" y="3566160"/>
-            <a:ext cx="201168" cy="201168"/>
+            <a:off x="365760" y="3291840"/>
+            <a:ext cx="274320" cy="274320"/>
           </a:xfrm>
           <a:prstGeom prst="ellipse">
             <a:avLst/>
@@ -3431,7 +3431,7 @@
           <a:lstStyle/>
           <a:p>
             <a:pPr algn="ctr">
-              <a:defRPr sz="700" b="1">
+              <a:defRPr sz="900" b="1">
                 <a:solidFill>
                   <a:srgbClr val="FFFFFF"/>
                 </a:solidFill>
@@ -3451,8 +3451,8 @@
         </p:nvSpPr>
         <p:spPr>
           <a:xfrm>
-            <a:off x="548640" y="3520440"/>
-            <a:ext cx="6400800" cy="736092"/>
+            <a:off x="777240" y="3291840"/>
+            <a:ext cx="5943600" cy="411480"/>
           </a:xfrm>
           <a:prstGeom prst="rect">
             <a:avLst/>
@@ -3460,13 +3460,13 @@
           <a:noFill/>
         </p:spPr>
         <p:txBody>
-          <a:bodyPr wrap="square" tIns="25400" bIns="0" lIns="0">
+          <a:bodyPr wrap="square">
             <a:spAutoFit/>
           </a:bodyPr>
           <a:lstStyle/>
           <a:p>
             <a:pPr>
-              <a:defRPr sz="800">
+              <a:defRPr sz="1000">
                 <a:solidFill>
                   <a:srgbClr val="CCCCCC"/>
                 </a:solidFill>
@@ -3474,7 +3474,7 @@
               </a:defRPr>
             </a:pPr>
             <a:r>
-              <a:t>EventBridge (CloudWatch Events) delivers a near-real-time stream of system events that describe chan</a:t>
+              <a:t>EventBridge (CloudWatch Events) delivers a near-real-time stream of system events that describe changes in Amazon Web Se</a:t>
             </a:r>
           </a:p>
         </p:txBody>
@@ -3487,8 +3487,8 @@
         </p:nvSpPr>
         <p:spPr>
           <a:xfrm>
-            <a:off x="274320" y="4320540"/>
-            <a:ext cx="201168" cy="201168"/>
+            <a:off x="365760" y="3749039"/>
+            <a:ext cx="274320" cy="274320"/>
           </a:xfrm>
           <a:prstGeom prst="ellipse">
             <a:avLst/>
@@ -3519,7 +3519,7 @@
           <a:lstStyle/>
           <a:p>
             <a:pPr algn="ctr">
-              <a:defRPr sz="700" b="1">
+              <a:defRPr sz="900" b="1">
                 <a:solidFill>
                   <a:srgbClr val="FFFFFF"/>
                 </a:solidFill>
@@ -3539,8 +3539,8 @@
         </p:nvSpPr>
         <p:spPr>
           <a:xfrm>
-            <a:off x="548640" y="4274820"/>
-            <a:ext cx="6400800" cy="736092"/>
+            <a:off x="777240" y="3749039"/>
+            <a:ext cx="5943600" cy="411480"/>
           </a:xfrm>
           <a:prstGeom prst="rect">
             <a:avLst/>
@@ -3548,13 +3548,13 @@
           <a:noFill/>
         </p:spPr>
         <p:txBody>
-          <a:bodyPr wrap="square" tIns="25400" bIns="0" lIns="0">
+          <a:bodyPr wrap="square">
             <a:spAutoFit/>
           </a:bodyPr>
           <a:lstStyle/>
           <a:p>
             <a:pPr>
-              <a:defRPr sz="800">
+              <a:defRPr sz="1000">
                 <a:solidFill>
                   <a:srgbClr val="CCCCCC"/>
                 </a:solidFill>
@@ -3562,7 +3562,7 @@
               </a:defRPr>
             </a:pPr>
             <a:r>
-              <a:t>Trusted Advisor provides real-time guidance to help provision AWS resources to follow AWS best pract</a:t>
+              <a:t>Trusted Advisor provides real-time guidance to help provision AWS resources to follow AWS best practices. It can report </a:t>
             </a:r>
           </a:p>
         </p:txBody>
@@ -3845,7 +3845,7 @@
         <p:spPr>
           <a:xfrm>
             <a:off x="182880" y="914400"/>
-            <a:ext cx="2910559" cy="3840480"/>
+            <a:ext cx="2442151" cy="3840480"/>
           </a:xfrm>
           <a:prstGeom prst="rect">
             <a:avLst/>
@@ -3980,9 +3980,9 @@
           <a:p>
             <a:pPr>
               <a:spcAft>
-                <a:spcPts val="400"/>
+                <a:spcPts val="600"/>
               </a:spcAft>
-              <a:defRPr sz="800">
+              <a:defRPr sz="900">
                 <a:solidFill>
                   <a:srgbClr val="212121"/>
                 </a:solidFill>
@@ -3990,15 +3990,15 @@
               </a:defRPr>
             </a:pPr>
             <a:r>
-              <a:t>• X-Ray creates a map of services used by your application with trace data</a:t>
+              <a:t>• X-Ray creates a map of services used by your application with trace data.</a:t>
             </a:r>
           </a:p>
           <a:p>
             <a:pPr>
               <a:spcAft>
-                <a:spcPts val="400"/>
+                <a:spcPts val="600"/>
               </a:spcAft>
-              <a:defRPr sz="800">
+              <a:defRPr sz="900">
                 <a:solidFill>
                   <a:srgbClr val="212121"/>
                 </a:solidFill>
@@ -4006,15 +4006,15 @@
               </a:defRPr>
             </a:pPr>
             <a:r>
-              <a:t>• You can use the trace data to drill into specific services or issues</a:t>
+              <a:t>• You can use the trace data to drill into specific services or issues.</a:t>
             </a:r>
           </a:p>
           <a:p>
             <a:pPr>
               <a:spcAft>
-                <a:spcPts val="400"/>
+                <a:spcPts val="600"/>
               </a:spcAft>
-              <a:defRPr sz="800">
+              <a:defRPr sz="900">
                 <a:solidFill>
                   <a:srgbClr val="212121"/>
                 </a:solidFill>
@@ -4022,23 +4022,7 @@
               </a:defRPr>
             </a:pPr>
             <a:r>
-              <a:t>• This data provides a view of connections between services in your application and aggregated data for each service</a:t>
-            </a:r>
-          </a:p>
-          <a:p>
-            <a:pPr>
-              <a:spcAft>
-                <a:spcPts val="400"/>
-              </a:spcAft>
-              <a:defRPr sz="800">
-                <a:solidFill>
-                  <a:srgbClr val="212121"/>
-                </a:solidFill>
-                <a:latin typeface="Segoe UI"/>
-              </a:defRPr>
-            </a:pPr>
-            <a:r>
-              <a:t>• Including average latency and failure rates</a:t>
+              <a:t>• This data provides a view of connections between services in your application and aggregated data for each service, including average latency and failure rates.</a:t>
             </a:r>
           </a:p>
         </p:txBody>
@@ -4217,8 +4201,8 @@
         </p:blipFill>
         <p:spPr>
           <a:xfrm>
-            <a:off x="182880" y="1165256"/>
-            <a:ext cx="5303520" cy="3338767"/>
+            <a:off x="182880" y="914400"/>
+            <a:ext cx="3952239" cy="3840480"/>
           </a:xfrm>
           <a:prstGeom prst="rect">
             <a:avLst/>
@@ -4353,9 +4337,9 @@
           <a:p>
             <a:pPr>
               <a:spcAft>
-                <a:spcPts val="400"/>
+                <a:spcPts val="600"/>
               </a:spcAft>
-              <a:defRPr sz="800">
+              <a:defRPr sz="900">
                 <a:solidFill>
                   <a:srgbClr val="212121"/>
                 </a:solidFill>
@@ -4363,15 +4347,15 @@
               </a:defRPr>
             </a:pPr>
             <a:r>
-              <a:t>• CloudTrail event history is used to record API calls for governance</a:t>
+              <a:t>• CloudTrail event history is used to record API calls for governance, compliance operation, and risk auditing purposes.</a:t>
             </a:r>
           </a:p>
           <a:p>
             <a:pPr>
               <a:spcAft>
-                <a:spcPts val="400"/>
+                <a:spcPts val="600"/>
               </a:spcAft>
-              <a:defRPr sz="800">
+              <a:defRPr sz="900">
                 <a:solidFill>
                   <a:srgbClr val="212121"/>
                 </a:solidFill>
@@ -4379,39 +4363,7 @@
               </a:defRPr>
             </a:pPr>
             <a:r>
-              <a:t>• Compliance operation</a:t>
-            </a:r>
-          </a:p>
-          <a:p>
-            <a:pPr>
-              <a:spcAft>
-                <a:spcPts val="400"/>
-              </a:spcAft>
-              <a:defRPr sz="800">
-                <a:solidFill>
-                  <a:srgbClr val="212121"/>
-                </a:solidFill>
-                <a:latin typeface="Segoe UI"/>
-              </a:defRPr>
-            </a:pPr>
-            <a:r>
-              <a:t>• And risk auditing purposes</a:t>
-            </a:r>
-          </a:p>
-          <a:p>
-            <a:pPr>
-              <a:spcAft>
-                <a:spcPts val="400"/>
-              </a:spcAft>
-              <a:defRPr sz="800">
-                <a:solidFill>
-                  <a:srgbClr val="212121"/>
-                </a:solidFill>
-                <a:latin typeface="Segoe UI"/>
-              </a:defRPr>
-            </a:pPr>
-            <a:r>
-              <a:t>• CloudTrail is not a service that is used for identifying application performance issues</a:t>
+              <a:t>• CloudTrail is not a service that is used for identifying application performance issues.</a:t>
             </a:r>
           </a:p>
         </p:txBody>
@@ -4590,8 +4542,8 @@
         </p:blipFill>
         <p:spPr>
           <a:xfrm>
-            <a:off x="182880" y="1238983"/>
-            <a:ext cx="5303520" cy="3191313"/>
+            <a:off x="182880" y="1797926"/>
+            <a:ext cx="5303520" cy="2073427"/>
           </a:xfrm>
           <a:prstGeom prst="rect">
             <a:avLst/>
@@ -4726,9 +4678,9 @@
           <a:p>
             <a:pPr>
               <a:spcAft>
-                <a:spcPts val="400"/>
+                <a:spcPts val="600"/>
               </a:spcAft>
-              <a:defRPr sz="800">
+              <a:defRPr sz="900">
                 <a:solidFill>
                   <a:srgbClr val="212121"/>
                 </a:solidFill>
@@ -4736,15 +4688,15 @@
               </a:defRPr>
             </a:pPr>
             <a:r>
-              <a:t>• EventBridge (CloudWatch Events) delivers a near-real-time stream of system events that describe changes in Amazon Web Services resources</a:t>
+              <a:t>• EventBridge (CloudWatch Events) delivers a near-real-time stream of system events that describe changes in Amazon Web Services resources.</a:t>
             </a:r>
           </a:p>
           <a:p>
             <a:pPr>
               <a:spcAft>
-                <a:spcPts val="400"/>
+                <a:spcPts val="600"/>
               </a:spcAft>
-              <a:defRPr sz="800">
+              <a:defRPr sz="900">
                 <a:solidFill>
                   <a:srgbClr val="212121"/>
                 </a:solidFill>
@@ -4752,7 +4704,7 @@
               </a:defRPr>
             </a:pPr>
             <a:r>
-              <a:t>• It is not used for identifying application performance issues</a:t>
+              <a:t>• It is not used for identifying application performance issues.</a:t>
             </a:r>
           </a:p>
         </p:txBody>
@@ -4931,8 +4883,8 @@
         </p:blipFill>
         <p:spPr>
           <a:xfrm>
-            <a:off x="182880" y="1288961"/>
-            <a:ext cx="5303520" cy="3091356"/>
+            <a:off x="182880" y="1093384"/>
+            <a:ext cx="5303520" cy="3482511"/>
           </a:xfrm>
           <a:prstGeom prst="rect">
             <a:avLst/>
@@ -5067,9 +5019,9 @@
           <a:p>
             <a:pPr>
               <a:spcAft>
-                <a:spcPts val="400"/>
+                <a:spcPts val="600"/>
               </a:spcAft>
-              <a:defRPr sz="800">
+              <a:defRPr sz="900">
                 <a:solidFill>
                   <a:srgbClr val="212121"/>
                 </a:solidFill>
@@ -5077,15 +5029,15 @@
               </a:defRPr>
             </a:pPr>
             <a:r>
-              <a:t>• Trusted Advisor provides real-time guidance to help provision AWS resources to follow AWS best practices</a:t>
+              <a:t>• Trusted Advisor provides real-time guidance to help provision AWS resources to follow AWS best practices.</a:t>
             </a:r>
           </a:p>
           <a:p>
             <a:pPr>
               <a:spcAft>
-                <a:spcPts val="400"/>
+                <a:spcPts val="600"/>
               </a:spcAft>
-              <a:defRPr sz="800">
+              <a:defRPr sz="900">
                 <a:solidFill>
                   <a:srgbClr val="212121"/>
                 </a:solidFill>
@@ -5093,23 +5045,7 @@
               </a:defRPr>
             </a:pPr>
             <a:r>
-              <a:t>• It can report overall system utilization</a:t>
-            </a:r>
-          </a:p>
-          <a:p>
-            <a:pPr>
-              <a:spcAft>
-                <a:spcPts val="400"/>
-              </a:spcAft>
-              <a:defRPr sz="800">
-                <a:solidFill>
-                  <a:srgbClr val="212121"/>
-                </a:solidFill>
-                <a:latin typeface="Segoe UI"/>
-              </a:defRPr>
-            </a:pPr>
-            <a:r>
-              <a:t>• But it is not used for identifying application performance issues</a:t>
+              <a:t>• It can report overall system utilization, but it is not used for identifying application performance issues.</a:t>
             </a:r>
           </a:p>
         </p:txBody>
